--- a/CODA-Association/CODAwork2026/data_outputs/CodaWork2026_FinalTalk_13Slide_2026-05-24.pptx
+++ b/CODA-Association/CODAwork2026/data_outputs/CodaWork2026_FinalTalk_13Slide_2026-05-24.pptx
@@ -3116,8 +3116,8 @@
         </p:nvSpPr>
         <p:spPr>
           <a:xfrm>
-            <a:off x="457200" y="914400"/>
-            <a:ext cx="9144000" cy="1097280"/>
+            <a:off x="457200" y="502920"/>
+            <a:ext cx="9144000" cy="914400"/>
           </a:xfrm>
           <a:prstGeom prst="rect">
             <a:avLst/>
@@ -3151,8 +3151,8 @@
         </p:nvSpPr>
         <p:spPr>
           <a:xfrm>
-            <a:off x="457200" y="2286000"/>
-            <a:ext cx="9144000" cy="548640"/>
+            <a:off x="457200" y="1691640"/>
+            <a:ext cx="9144000" cy="457200"/>
           </a:xfrm>
           <a:prstGeom prst="rect">
             <a:avLst/>
@@ -3186,8 +3186,8 @@
         </p:nvSpPr>
         <p:spPr>
           <a:xfrm>
-            <a:off x="457200" y="2926080"/>
-            <a:ext cx="9144000" cy="457200"/>
+            <a:off x="457200" y="2194560"/>
+            <a:ext cx="9144000" cy="365760"/>
           </a:xfrm>
           <a:prstGeom prst="rect">
             <a:avLst/>
@@ -3221,7 +3221,42 @@
         </p:nvSpPr>
         <p:spPr>
           <a:xfrm>
-            <a:off x="457200" y="3657600"/>
+            <a:off x="457200" y="2788920"/>
+            <a:ext cx="9144000" cy="320040"/>
+          </a:xfrm>
+          <a:prstGeom prst="rect">
+            <a:avLst/>
+          </a:prstGeom>
+          <a:noFill/>
+        </p:spPr>
+        <p:txBody>
+          <a:bodyPr wrap="square" lIns="60000" rIns="60000" tIns="30000" bIns="30000">
+            <a:spAutoFit/>
+          </a:bodyPr>
+          <a:lstStyle/>
+          <a:p>
+            <a:pPr algn="ctr"/>
+            <a:r>
+              <a:rPr sz="1200" b="0" i="1">
+                <a:solidFill>
+                  <a:srgbClr val="F2B632"/>
+                </a:solidFill>
+                <a:latin typeface="Calibri"/>
+              </a:rPr>
+              <a:t>Follow along on the repository — the slide deck, manuscript, and live projector are all open.</a:t>
+            </a:r>
+          </a:p>
+        </p:txBody>
+      </p:sp>
+      <p:sp>
+        <p:nvSpPr>
+          <p:cNvPr id="6" name="TextBox 5"/>
+          <p:cNvSpPr txBox="1"/>
+          <p:nvPr/>
+        </p:nvSpPr>
+        <p:spPr>
+          <a:xfrm>
+            <a:off x="457200" y="3154680"/>
             <a:ext cx="9144000" cy="365760"/>
           </a:xfrm>
           <a:prstGeom prst="rect">
@@ -3239,6 +3274,41 @@
             <a:r>
               <a:rPr sz="1200" b="0" i="1">
                 <a:solidFill>
+                  <a:srgbClr val="EEEEEE"/>
+                </a:solidFill>
+                <a:latin typeface="Calibri"/>
+              </a:rPr>
+              <a:t>Hˢ runs any compositional dataset the CoDa community can describe — the views in this talk are reproducible on your data.</a:t>
+            </a:r>
+          </a:p>
+        </p:txBody>
+      </p:sp>
+      <p:sp>
+        <p:nvSpPr>
+          <p:cNvPr id="7" name="TextBox 6"/>
+          <p:cNvSpPr txBox="1"/>
+          <p:nvPr/>
+        </p:nvSpPr>
+        <p:spPr>
+          <a:xfrm>
+            <a:off x="457200" y="3703320"/>
+            <a:ext cx="9144000" cy="365760"/>
+          </a:xfrm>
+          <a:prstGeom prst="rect">
+            <a:avLst/>
+          </a:prstGeom>
+          <a:noFill/>
+        </p:spPr>
+        <p:txBody>
+          <a:bodyPr wrap="square" lIns="60000" rIns="60000" tIns="30000" bIns="30000">
+            <a:spAutoFit/>
+          </a:bodyPr>
+          <a:lstStyle/>
+          <a:p>
+            <a:pPr algn="ctr"/>
+            <a:r>
+              <a:rPr sz="1200" b="0" i="1">
+                <a:solidFill>
                   <a:srgbClr val="F2B632"/>
                 </a:solidFill>
                 <a:latin typeface="Calibri"/>
@@ -3250,13 +3320,13 @@
       </p:sp>
       <p:sp>
         <p:nvSpPr>
-          <p:cNvPr id="6" name="TextBox 5"/>
-          <p:cNvSpPr txBox="1"/>
-          <p:nvPr/>
-        </p:nvSpPr>
-        <p:spPr>
-          <a:xfrm>
-            <a:off x="457200" y="4389120"/>
+          <p:cNvPr id="8" name="TextBox 7"/>
+          <p:cNvSpPr txBox="1"/>
+          <p:nvPr/>
+        </p:nvSpPr>
+        <p:spPr>
+          <a:xfrm>
+            <a:off x="457200" y="4297680"/>
             <a:ext cx="9144000" cy="365760"/>
           </a:xfrm>
           <a:prstGeom prst="rect">
@@ -3285,13 +3355,13 @@
       </p:sp>
       <p:sp>
         <p:nvSpPr>
-          <p:cNvPr id="7" name="TextBox 6"/>
-          <p:cNvSpPr txBox="1"/>
-          <p:nvPr/>
-        </p:nvSpPr>
-        <p:spPr>
-          <a:xfrm>
-            <a:off x="457200" y="4937760"/>
+          <p:cNvPr id="9" name="TextBox 8"/>
+          <p:cNvSpPr txBox="1"/>
+          <p:nvPr/>
+        </p:nvSpPr>
+        <p:spPr>
+          <a:xfrm>
+            <a:off x="457200" y="4800600"/>
             <a:ext cx="9144000" cy="365760"/>
           </a:xfrm>
           <a:prstGeom prst="rect">
@@ -3320,13 +3390,13 @@
       </p:sp>
       <p:sp>
         <p:nvSpPr>
-          <p:cNvPr id="8" name="TextBox 7"/>
-          <p:cNvSpPr txBox="1"/>
-          <p:nvPr/>
-        </p:nvSpPr>
-        <p:spPr>
-          <a:xfrm>
-            <a:off x="457200" y="5532120"/>
+          <p:cNvPr id="10" name="TextBox 9"/>
+          <p:cNvSpPr txBox="1"/>
+          <p:nvPr/>
+        </p:nvSpPr>
+        <p:spPr>
+          <a:xfrm>
+            <a:off x="457200" y="5394960"/>
             <a:ext cx="9144000" cy="274320"/>
           </a:xfrm>
           <a:prstGeom prst="rect">
@@ -3355,13 +3425,13 @@
       </p:sp>
       <p:sp>
         <p:nvSpPr>
-          <p:cNvPr id="9" name="TextBox 8"/>
-          <p:cNvSpPr txBox="1"/>
-          <p:nvPr/>
-        </p:nvSpPr>
-        <p:spPr>
-          <a:xfrm>
-            <a:off x="457200" y="5806440"/>
+          <p:cNvPr id="11" name="TextBox 10"/>
+          <p:cNvSpPr txBox="1"/>
+          <p:nvPr/>
+        </p:nvSpPr>
+        <p:spPr>
+          <a:xfrm>
+            <a:off x="457200" y="5687568"/>
             <a:ext cx="9144000" cy="320040"/>
           </a:xfrm>
           <a:prstGeom prst="rect">
@@ -3390,13 +3460,13 @@
       </p:sp>
       <p:sp>
         <p:nvSpPr>
-          <p:cNvPr id="10" name="TextBox 9"/>
-          <p:cNvSpPr txBox="1"/>
-          <p:nvPr/>
-        </p:nvSpPr>
-        <p:spPr>
-          <a:xfrm>
-            <a:off x="457200" y="6172200"/>
+          <p:cNvPr id="12" name="TextBox 11"/>
+          <p:cNvSpPr txBox="1"/>
+          <p:nvPr/>
+        </p:nvSpPr>
+        <p:spPr>
+          <a:xfrm>
+            <a:off x="457200" y="6053328"/>
             <a:ext cx="9144000" cy="320040"/>
           </a:xfrm>
           <a:prstGeom prst="rect">
@@ -3425,13 +3495,13 @@
       </p:sp>
       <p:sp>
         <p:nvSpPr>
-          <p:cNvPr id="11" name="TextBox 10"/>
-          <p:cNvSpPr txBox="1"/>
-          <p:nvPr/>
-        </p:nvSpPr>
-        <p:spPr>
-          <a:xfrm>
-            <a:off x="457200" y="6537960"/>
+          <p:cNvPr id="13" name="TextBox 12"/>
+          <p:cNvSpPr txBox="1"/>
+          <p:nvPr/>
+        </p:nvSpPr>
+        <p:spPr>
+          <a:xfrm>
+            <a:off x="457200" y="6446520"/>
             <a:ext cx="9144000" cy="320040"/>
           </a:xfrm>
           <a:prstGeom prst="rect">
@@ -3460,13 +3530,13 @@
       </p:sp>
       <p:sp>
         <p:nvSpPr>
-          <p:cNvPr id="12" name="TextBox 11"/>
-          <p:cNvSpPr txBox="1"/>
-          <p:nvPr/>
-        </p:nvSpPr>
-        <p:spPr>
-          <a:xfrm>
-            <a:off x="457200" y="7178040"/>
+          <p:cNvPr id="14" name="TextBox 13"/>
+          <p:cNvSpPr txBox="1"/>
+          <p:nvPr/>
+        </p:nvSpPr>
+        <p:spPr>
+          <a:xfrm>
+            <a:off x="457200" y="7086600"/>
             <a:ext cx="9144000" cy="320040"/>
           </a:xfrm>
           <a:prstGeom prst="rect">
@@ -5195,7 +5265,7 @@
                 </a:solidFill>
                 <a:latin typeface="Calibri"/>
               </a:rPr>
-              <a:t>World electricity, 25 years — the standard stacked-area view</a:t>
+              <a:t>Germany electricity, 25 years — the standard stacked-area view</a:t>
             </a:r>
           </a:p>
         </p:txBody>
@@ -5230,7 +5300,7 @@
                 </a:solidFill>
                 <a:latin typeface="Calibri"/>
               </a:rPr>
-              <a:t>Coal stays dominant.  Gas grows.  Nuclear declines.</a:t>
+              <a:t>Coal and lignite recede.  Nuclear phases out.</a:t>
             </a:r>
           </a:p>
           <a:p>
@@ -5242,7 +5312,7 @@
                 </a:solidFill>
                 <a:latin typeface="Calibri"/>
               </a:rPr>
-              <a:t>Solar appears as a thin yellow sliver after 2010.</a:t>
+              <a:t>Gas holds.  Solar and wind grow steadily.</a:t>
             </a:r>
           </a:p>
           <a:p>
@@ -5254,7 +5324,7 @@
                 </a:solidFill>
                 <a:latin typeface="Calibri"/>
               </a:rPr>
-              <a:t>Wind grows steadily but stays visually small until late.</a:t>
+              <a:t>Wind passes coal in the late 2010s.</a:t>
             </a:r>
           </a:p>
         </p:txBody>
@@ -5324,7 +5394,7 @@
                 </a:solidFill>
                 <a:latin typeface="Calibri"/>
               </a:rPr>
-              <a:t>USA Solar, 2012 → 2013</a:t>
+              <a:t>Germany Solar, 2005 → 2006</a:t>
             </a:r>
           </a:p>
         </p:txBody>
@@ -5359,7 +5429,7 @@
                 </a:solidFill>
                 <a:latin typeface="Consolas"/>
               </a:rPr>
-              <a:t>starting share        0.107 %</a:t>
+              <a:t>starting share        0.21  %</a:t>
             </a:r>
           </a:p>
           <a:p>
@@ -5371,7 +5441,7 @@
                 </a:solidFill>
                 <a:latin typeface="Consolas"/>
               </a:rPr>
-              <a:t>structural Power Share  81.7 %</a:t>
+              <a:t>structural Power Share  71.1 %</a:t>
             </a:r>
           </a:p>
           <a:p>
@@ -5383,7 +5453,7 @@
                 </a:solidFill>
                 <a:latin typeface="Consolas"/>
               </a:rPr>
-              <a:t>Activation Coefficient   ≈ 760 ×</a:t>
+              <a:t>Activation Coefficient   ≈ 333 ×</a:t>
             </a:r>
           </a:p>
         </p:txBody>
@@ -5397,7 +5467,7 @@
         <p:spPr>
           <a:xfrm>
             <a:off x="6035040" y="4434840"/>
-            <a:ext cx="3840480" cy="914400"/>
+            <a:ext cx="3840480" cy="1097280"/>
           </a:xfrm>
           <a:prstGeom prst="rect">
             <a:avLst/>
@@ -5418,7 +5488,7 @@
                 </a:solidFill>
                 <a:latin typeface="Calibri"/>
               </a:rPr>
-              <a:t>Solar acted at 760 × its size.</a:t>
+              <a:t>Solar acted at 333 × its size,</a:t>
             </a:r>
           </a:p>
           <a:p>
@@ -5430,7 +5500,19 @@
                 </a:solidFill>
                 <a:latin typeface="Calibri"/>
               </a:rPr>
-              <a:t>No size view shows that.</a:t>
+              <a:t>four years before the share view</a:t>
+            </a:r>
+          </a:p>
+          <a:p>
+            <a:pPr algn="l"/>
+            <a:r>
+              <a:rPr sz="1300" b="0" i="1">
+                <a:solidFill>
+                  <a:srgbClr val="C98A1C"/>
+                </a:solidFill>
+                <a:latin typeface="Calibri"/>
+              </a:rPr>
+              <a:t>calls solar visible.</a:t>
             </a:r>
           </a:p>
         </p:txBody>
@@ -5687,8 +5769,8 @@
         </p:blipFill>
         <p:spPr>
           <a:xfrm>
-            <a:off x="548640" y="1554480"/>
-            <a:ext cx="5120640" cy="3911600"/>
+            <a:off x="457200" y="1645920"/>
+            <a:ext cx="4937760" cy="3771900"/>
           </a:xfrm>
           <a:prstGeom prst="rect">
             <a:avLst/>
@@ -5703,8 +5785,8 @@
         </p:nvSpPr>
         <p:spPr>
           <a:xfrm>
-            <a:off x="5943600" y="1691640"/>
-            <a:ext cx="3657600" cy="365760"/>
+            <a:off x="5669280" y="1645920"/>
+            <a:ext cx="4114800" cy="411480"/>
           </a:xfrm>
           <a:prstGeom prst="rect">
             <a:avLst/>
@@ -5719,7 +5801,7 @@
           <a:p>
             <a:pPr algn="l"/>
             <a:r>
-              <a:rPr sz="1500" b="1" i="0">
+              <a:rPr sz="1800" b="1" i="0">
                 <a:solidFill>
                   <a:srgbClr val="F2B632"/>
                 </a:solidFill>
@@ -5738,8 +5820,8 @@
         </p:nvSpPr>
         <p:spPr>
           <a:xfrm>
-            <a:off x="5943600" y="2057400"/>
-            <a:ext cx="3657600" cy="320040"/>
+            <a:off x="5669280" y="2057400"/>
+            <a:ext cx="4114800" cy="365760"/>
           </a:xfrm>
           <a:prstGeom prst="rect">
             <a:avLst/>
@@ -5754,7 +5836,7 @@
           <a:p>
             <a:pPr algn="l"/>
             <a:r>
-              <a:rPr sz="1200" b="0" i="0">
+              <a:rPr sz="1300" b="0" i="0">
                 <a:solidFill>
                   <a:srgbClr val="EEEEEE"/>
                 </a:solidFill>
@@ -5773,8 +5855,8 @@
         </p:nvSpPr>
         <p:spPr>
           <a:xfrm>
-            <a:off x="5943600" y="2514600"/>
-            <a:ext cx="3657600" cy="365760"/>
+            <a:off x="5669280" y="2606040"/>
+            <a:ext cx="4114800" cy="411480"/>
           </a:xfrm>
           <a:prstGeom prst="rect">
             <a:avLst/>
@@ -5789,7 +5871,7 @@
           <a:p>
             <a:pPr algn="l"/>
             <a:r>
-              <a:rPr sz="1500" b="1" i="0">
+              <a:rPr sz="1800" b="1" i="0">
                 <a:solidFill>
                   <a:srgbClr val="F2B632"/>
                 </a:solidFill>
@@ -5808,8 +5890,8 @@
         </p:nvSpPr>
         <p:spPr>
           <a:xfrm>
-            <a:off x="5943600" y="2880360"/>
-            <a:ext cx="3657600" cy="365760"/>
+            <a:off x="5669280" y="3017520"/>
+            <a:ext cx="4114800" cy="365760"/>
           </a:xfrm>
           <a:prstGeom prst="rect">
             <a:avLst/>
@@ -5824,7 +5906,7 @@
           <a:p>
             <a:pPr algn="l"/>
             <a:r>
-              <a:rPr sz="1200" b="0" i="0">
+              <a:rPr sz="1300" b="0" i="0">
                 <a:solidFill>
                   <a:srgbClr val="EEEEEE"/>
                 </a:solidFill>
@@ -5843,8 +5925,8 @@
         </p:nvSpPr>
         <p:spPr>
           <a:xfrm>
-            <a:off x="5943600" y="3429000"/>
-            <a:ext cx="3657600" cy="365760"/>
+            <a:off x="5669280" y="3566160"/>
+            <a:ext cx="4114800" cy="411480"/>
           </a:xfrm>
           <a:prstGeom prst="rect">
             <a:avLst/>
@@ -5859,7 +5941,7 @@
           <a:p>
             <a:pPr algn="l"/>
             <a:r>
-              <a:rPr sz="1500" b="1" i="0">
+              <a:rPr sz="1800" b="1" i="0">
                 <a:solidFill>
                   <a:srgbClr val="F2B632"/>
                 </a:solidFill>
@@ -5878,8 +5960,8 @@
         </p:nvSpPr>
         <p:spPr>
           <a:xfrm>
-            <a:off x="5943600" y="3794760"/>
-            <a:ext cx="3657600" cy="320040"/>
+            <a:off x="5669280" y="3977639"/>
+            <a:ext cx="4114800" cy="365760"/>
           </a:xfrm>
           <a:prstGeom prst="rect">
             <a:avLst/>
@@ -5894,7 +5976,7 @@
           <a:p>
             <a:pPr algn="l"/>
             <a:r>
-              <a:rPr sz="1200" b="0" i="0">
+              <a:rPr sz="1300" b="0" i="0">
                 <a:solidFill>
                   <a:srgbClr val="EEEEEE"/>
                 </a:solidFill>
@@ -5913,8 +5995,8 @@
         </p:nvSpPr>
         <p:spPr>
           <a:xfrm>
-            <a:off x="5943600" y="4251960"/>
-            <a:ext cx="3657600" cy="365760"/>
+            <a:off x="5669280" y="4526280"/>
+            <a:ext cx="4114800" cy="411480"/>
           </a:xfrm>
           <a:prstGeom prst="rect">
             <a:avLst/>
@@ -5929,7 +6011,7 @@
           <a:p>
             <a:pPr algn="l"/>
             <a:r>
-              <a:rPr sz="1500" b="1" i="0">
+              <a:rPr sz="1800" b="1" i="0">
                 <a:solidFill>
                   <a:srgbClr val="F2B632"/>
                 </a:solidFill>
@@ -5948,8 +6030,8 @@
         </p:nvSpPr>
         <p:spPr>
           <a:xfrm>
-            <a:off x="5943600" y="4617720"/>
-            <a:ext cx="3657600" cy="365760"/>
+            <a:off x="5669280" y="4937760"/>
+            <a:ext cx="4114800" cy="365760"/>
           </a:xfrm>
           <a:prstGeom prst="rect">
             <a:avLst/>
@@ -5964,7 +6046,7 @@
           <a:p>
             <a:pPr algn="l"/>
             <a:r>
-              <a:rPr sz="1200" b="0" i="0">
+              <a:rPr sz="1300" b="0" i="0">
                 <a:solidFill>
                   <a:srgbClr val="EEEEEE"/>
                 </a:solidFill>
@@ -5983,8 +6065,8 @@
         </p:nvSpPr>
         <p:spPr>
           <a:xfrm>
-            <a:off x="5943600" y="5166360"/>
-            <a:ext cx="3657600" cy="365760"/>
+            <a:off x="5669280" y="5486400"/>
+            <a:ext cx="4114800" cy="411480"/>
           </a:xfrm>
           <a:prstGeom prst="rect">
             <a:avLst/>
@@ -5999,7 +6081,7 @@
           <a:p>
             <a:pPr algn="l"/>
             <a:r>
-              <a:rPr sz="1500" b="1" i="0">
+              <a:rPr sz="1800" b="1" i="0">
                 <a:solidFill>
                   <a:srgbClr val="F2B632"/>
                 </a:solidFill>
@@ -6018,8 +6100,8 @@
         </p:nvSpPr>
         <p:spPr>
           <a:xfrm>
-            <a:off x="5943600" y="5532120"/>
-            <a:ext cx="3657600" cy="365760"/>
+            <a:off x="5669280" y="5897880"/>
+            <a:ext cx="4114800" cy="365760"/>
           </a:xfrm>
           <a:prstGeom prst="rect">
             <a:avLst/>
@@ -6034,7 +6116,7 @@
           <a:p>
             <a:pPr algn="l"/>
             <a:r>
-              <a:rPr sz="1200" b="0" i="0">
+              <a:rPr sz="1300" b="0" i="0">
                 <a:solidFill>
                   <a:srgbClr val="EEEEEE"/>
                 </a:solidFill>
@@ -6053,7 +6135,7 @@
         </p:nvSpPr>
         <p:spPr>
           <a:xfrm>
-            <a:off x="457200" y="6858000"/>
+            <a:off x="457200" y="6903720"/>
             <a:ext cx="9144000" cy="365760"/>
           </a:xfrm>
           <a:prstGeom prst="rect">
@@ -6416,7 +6498,7 @@
                 </a:solidFill>
                 <a:latin typeface="Calibri"/>
               </a:rPr>
-              <a:t>Worked example — USA Solar 2012 → 2013</a:t>
+              <a:t>Worked example — Germany Solar 2005 → 2006</a:t>
             </a:r>
           </a:p>
         </p:txBody>
@@ -6451,7 +6533,7 @@
                 </a:solidFill>
                 <a:latin typeface="Consolas"/>
               </a:rPr>
-              <a:t>starting share      0.107 %     small</a:t>
+              <a:t>starting share      0.21  %     small</a:t>
             </a:r>
           </a:p>
           <a:p>
@@ -6463,7 +6545,7 @@
                 </a:solidFill>
                 <a:latin typeface="Consolas"/>
               </a:rPr>
-              <a:t>Power Share         81.7  %     most of the work</a:t>
+              <a:t>Power Share         71.1  %     most of the work</a:t>
             </a:r>
           </a:p>
           <a:p>
@@ -6475,7 +6557,7 @@
                 </a:solidFill>
                 <a:latin typeface="Consolas"/>
               </a:rPr>
-              <a:t>α                   ≈ 760 ×     yeast</a:t>
+              <a:t>α                   ≈ 333 ×     yeast</a:t>
             </a:r>
           </a:p>
         </p:txBody>
@@ -6545,7 +6627,7 @@
                 </a:solidFill>
                 <a:latin typeface="Calibri"/>
               </a:rPr>
-              <a:t>Solar 2010–2015 appears repeatedly as small-share / large-structural-work across the corpus.</a:t>
+              <a:t>The Energiewende's structural beginning, four years before solar appears in the share view.</a:t>
             </a:r>
           </a:p>
         </p:txBody>
